--- a/ゲーム科3年/00_前期/ゲームエンジンⅤ/10_マネージャークラス.pptx
+++ b/ゲーム科3年/00_前期/ゲームエンジンⅤ/10_マネージャークラス.pptx
@@ -9,10 +9,10 @@
     <p:sldId id="257" r:id="rId3"/>
     <p:sldId id="258" r:id="rId4"/>
     <p:sldId id="259" r:id="rId5"/>
-    <p:sldId id="260" r:id="rId6"/>
-    <p:sldId id="261" r:id="rId7"/>
-    <p:sldId id="262" r:id="rId8"/>
-    <p:sldId id="263" r:id="rId9"/>
+    <p:sldId id="261" r:id="rId6"/>
+    <p:sldId id="264" r:id="rId7"/>
+    <p:sldId id="263" r:id="rId8"/>
+    <p:sldId id="265" r:id="rId9"/>
   </p:sldIdLst>
   <p:sldSz cx="12192000" cy="6858000"/>
   <p:notesSz cx="6858000" cy="9144000"/>
@@ -266,7 +266,7 @@
           <a:p>
             <a:fld id="{E9CC885B-4903-4D54-9A93-00025F12DED9}" type="datetimeFigureOut">
               <a:rPr kumimoji="1" lang="ja-JP" altLang="en-US" smtClean="0"/>
-              <a:t>2025/2/7</a:t>
+              <a:t>2025/12/18</a:t>
             </a:fld>
             <a:endParaRPr kumimoji="1" lang="ja-JP" altLang="en-US"/>
           </a:p>
@@ -496,7 +496,7 @@
           <a:p>
             <a:fld id="{E9CC885B-4903-4D54-9A93-00025F12DED9}" type="datetimeFigureOut">
               <a:rPr kumimoji="1" lang="ja-JP" altLang="en-US" smtClean="0"/>
-              <a:t>2025/2/7</a:t>
+              <a:t>2025/12/18</a:t>
             </a:fld>
             <a:endParaRPr kumimoji="1" lang="ja-JP" altLang="en-US"/>
           </a:p>
@@ -736,7 +736,7 @@
           <a:p>
             <a:fld id="{E9CC885B-4903-4D54-9A93-00025F12DED9}" type="datetimeFigureOut">
               <a:rPr kumimoji="1" lang="ja-JP" altLang="en-US" smtClean="0"/>
-              <a:t>2025/2/7</a:t>
+              <a:t>2025/12/18</a:t>
             </a:fld>
             <a:endParaRPr kumimoji="1" lang="ja-JP" altLang="en-US"/>
           </a:p>
@@ -966,7 +966,7 @@
           <a:p>
             <a:fld id="{E9CC885B-4903-4D54-9A93-00025F12DED9}" type="datetimeFigureOut">
               <a:rPr kumimoji="1" lang="ja-JP" altLang="en-US" smtClean="0"/>
-              <a:t>2025/2/7</a:t>
+              <a:t>2025/12/18</a:t>
             </a:fld>
             <a:endParaRPr kumimoji="1" lang="ja-JP" altLang="en-US"/>
           </a:p>
@@ -1241,7 +1241,7 @@
           <a:p>
             <a:fld id="{E9CC885B-4903-4D54-9A93-00025F12DED9}" type="datetimeFigureOut">
               <a:rPr kumimoji="1" lang="ja-JP" altLang="en-US" smtClean="0"/>
-              <a:t>2025/2/7</a:t>
+              <a:t>2025/12/18</a:t>
             </a:fld>
             <a:endParaRPr kumimoji="1" lang="ja-JP" altLang="en-US"/>
           </a:p>
@@ -1570,7 +1570,7 @@
           <a:p>
             <a:fld id="{E9CC885B-4903-4D54-9A93-00025F12DED9}" type="datetimeFigureOut">
               <a:rPr kumimoji="1" lang="ja-JP" altLang="en-US" smtClean="0"/>
-              <a:t>2025/2/7</a:t>
+              <a:t>2025/12/18</a:t>
             </a:fld>
             <a:endParaRPr kumimoji="1" lang="ja-JP" altLang="en-US"/>
           </a:p>
@@ -2046,7 +2046,7 @@
           <a:p>
             <a:fld id="{E9CC885B-4903-4D54-9A93-00025F12DED9}" type="datetimeFigureOut">
               <a:rPr kumimoji="1" lang="ja-JP" altLang="en-US" smtClean="0"/>
-              <a:t>2025/2/7</a:t>
+              <a:t>2025/12/18</a:t>
             </a:fld>
             <a:endParaRPr kumimoji="1" lang="ja-JP" altLang="en-US"/>
           </a:p>
@@ -2187,7 +2187,7 @@
           <a:p>
             <a:fld id="{E9CC885B-4903-4D54-9A93-00025F12DED9}" type="datetimeFigureOut">
               <a:rPr kumimoji="1" lang="ja-JP" altLang="en-US" smtClean="0"/>
-              <a:t>2025/2/7</a:t>
+              <a:t>2025/12/18</a:t>
             </a:fld>
             <a:endParaRPr kumimoji="1" lang="ja-JP" altLang="en-US"/>
           </a:p>
@@ -2300,7 +2300,7 @@
           <a:p>
             <a:fld id="{E9CC885B-4903-4D54-9A93-00025F12DED9}" type="datetimeFigureOut">
               <a:rPr kumimoji="1" lang="ja-JP" altLang="en-US" smtClean="0"/>
-              <a:t>2025/2/7</a:t>
+              <a:t>2025/12/18</a:t>
             </a:fld>
             <a:endParaRPr kumimoji="1" lang="ja-JP" altLang="en-US"/>
           </a:p>
@@ -2643,7 +2643,7 @@
           <a:p>
             <a:fld id="{E9CC885B-4903-4D54-9A93-00025F12DED9}" type="datetimeFigureOut">
               <a:rPr kumimoji="1" lang="ja-JP" altLang="en-US" smtClean="0"/>
-              <a:t>2025/2/7</a:t>
+              <a:t>2025/12/18</a:t>
             </a:fld>
             <a:endParaRPr kumimoji="1" lang="ja-JP" altLang="en-US"/>
           </a:p>
@@ -2931,7 +2931,7 @@
           <a:p>
             <a:fld id="{E9CC885B-4903-4D54-9A93-00025F12DED9}" type="datetimeFigureOut">
               <a:rPr kumimoji="1" lang="ja-JP" altLang="en-US" smtClean="0"/>
-              <a:t>2025/2/7</a:t>
+              <a:t>2025/12/18</a:t>
             </a:fld>
             <a:endParaRPr kumimoji="1" lang="ja-JP" altLang="en-US"/>
           </a:p>
@@ -3204,7 +3204,7 @@
           <a:p>
             <a:fld id="{E9CC885B-4903-4D54-9A93-00025F12DED9}" type="datetimeFigureOut">
               <a:rPr kumimoji="1" lang="ja-JP" altLang="en-US" smtClean="0"/>
-              <a:t>2025/2/7</a:t>
+              <a:t>2025/12/18</a:t>
             </a:fld>
             <a:endParaRPr kumimoji="1" lang="ja-JP" altLang="en-US"/>
           </a:p>
@@ -3884,7 +3884,7 @@
         <p:spPr>
           <a:xfrm>
             <a:off x="567542" y="1216429"/>
-            <a:ext cx="10942419" cy="1200329"/>
+            <a:ext cx="10671511" cy="1200329"/>
           </a:xfrm>
           <a:prstGeom prst="rect">
             <a:avLst/>
@@ -3910,7 +3910,7 @@
                   <a:srgbClr val="FF0000"/>
                 </a:solidFill>
               </a:rPr>
-              <a:t>直接レベルに配置しない、システム的なもの</a:t>
+              <a:t>直接レベルに配置しないシステム的なもの</a:t>
             </a:r>
             <a:r>
               <a:rPr kumimoji="1" lang="ja-JP" altLang="en-US" sz="2400" dirty="0"/>
@@ -3922,18 +3922,18 @@
                   <a:srgbClr val="FF0000"/>
                 </a:solidFill>
               </a:rPr>
-              <a:t>UObject</a:t>
+              <a:t>UWorldSubSystem</a:t>
             </a:r>
             <a:r>
               <a:rPr kumimoji="1" lang="ja-JP" altLang="en-US" sz="2400" dirty="0"/>
-              <a:t>をベースに作ります。</a:t>
+              <a:t>をベースに</a:t>
             </a:r>
             <a:endParaRPr kumimoji="1" lang="en-US" altLang="ja-JP" sz="2400" dirty="0"/>
           </a:p>
           <a:p>
             <a:r>
               <a:rPr kumimoji="1" lang="ja-JP" altLang="en-US" sz="2400" dirty="0"/>
-              <a:t>親クラス選択画面に存在しないので「なし」を選びましょう。</a:t>
+              <a:t>作ります。全てのクラスから検索しましょう。</a:t>
             </a:r>
             <a:endParaRPr kumimoji="1" lang="en-US" altLang="ja-JP" sz="2400" dirty="0"/>
           </a:p>
@@ -3941,10 +3941,10 @@
       </p:sp>
       <p:pic>
         <p:nvPicPr>
-          <p:cNvPr id="3" name="図 2">
-            <a:extLst>
-              <a:ext uri="{FF2B5EF4-FFF2-40B4-BE49-F238E27FC236}">
-                <a16:creationId xmlns:a16="http://schemas.microsoft.com/office/drawing/2014/main" id="{2CB83038-4823-45AA-BD56-8015AD2AFB58}"/>
+          <p:cNvPr id="5" name="図 4">
+            <a:extLst>
+              <a:ext uri="{FF2B5EF4-FFF2-40B4-BE49-F238E27FC236}">
+                <a16:creationId xmlns:a16="http://schemas.microsoft.com/office/drawing/2014/main" id="{B06D9231-0AAD-43AA-91A1-8BFD9043E82D}"/>
               </a:ext>
             </a:extLst>
           </p:cNvPr>
@@ -3961,8 +3961,8 @@
         </p:blipFill>
         <p:spPr>
           <a:xfrm>
-            <a:off x="567542" y="2556458"/>
-            <a:ext cx="6971776" cy="3924510"/>
+            <a:off x="567542" y="2556459"/>
+            <a:ext cx="6433893" cy="3944670"/>
           </a:xfrm>
           <a:prstGeom prst="rect">
             <a:avLst/>
@@ -4080,10 +4080,10 @@
       </p:sp>
       <p:pic>
         <p:nvPicPr>
-          <p:cNvPr id="5" name="図 4">
-            <a:extLst>
-              <a:ext uri="{FF2B5EF4-FFF2-40B4-BE49-F238E27FC236}">
-                <a16:creationId xmlns:a16="http://schemas.microsoft.com/office/drawing/2014/main" id="{CE8001AB-1CE5-44E8-BC05-D69D97167037}"/>
+          <p:cNvPr id="8" name="図 7">
+            <a:extLst>
+              <a:ext uri="{FF2B5EF4-FFF2-40B4-BE49-F238E27FC236}">
+                <a16:creationId xmlns:a16="http://schemas.microsoft.com/office/drawing/2014/main" id="{9315D8D0-403A-4015-831B-353EE6AAC37B}"/>
               </a:ext>
             </a:extLst>
           </p:cNvPr>
@@ -4100,8 +4100,8 @@
         </p:blipFill>
         <p:spPr>
           <a:xfrm>
-            <a:off x="567542" y="1817794"/>
-            <a:ext cx="8713575" cy="4548252"/>
+            <a:off x="567542" y="1817795"/>
+            <a:ext cx="8459917" cy="4620588"/>
           </a:xfrm>
           <a:prstGeom prst="rect">
             <a:avLst/>
@@ -4219,10 +4219,10 @@
       </p:sp>
       <p:pic>
         <p:nvPicPr>
-          <p:cNvPr id="3" name="図 2">
-            <a:extLst>
-              <a:ext uri="{FF2B5EF4-FFF2-40B4-BE49-F238E27FC236}">
-                <a16:creationId xmlns:a16="http://schemas.microsoft.com/office/drawing/2014/main" id="{59EA29C6-B8E8-4D1E-BB57-3F823EA836DE}"/>
+          <p:cNvPr id="5" name="図 4">
+            <a:extLst>
+              <a:ext uri="{FF2B5EF4-FFF2-40B4-BE49-F238E27FC236}">
+                <a16:creationId xmlns:a16="http://schemas.microsoft.com/office/drawing/2014/main" id="{B8650486-0258-4E3E-893B-950268036021}"/>
               </a:ext>
             </a:extLst>
           </p:cNvPr>
@@ -4239,8 +4239,8 @@
         </p:blipFill>
         <p:spPr>
           <a:xfrm>
-            <a:off x="567542" y="1817794"/>
-            <a:ext cx="8051458" cy="4548252"/>
+            <a:off x="567543" y="1817794"/>
+            <a:ext cx="7124176" cy="4728587"/>
           </a:xfrm>
           <a:prstGeom prst="rect">
             <a:avLst/>
@@ -4341,17 +4341,57 @@
           <a:lstStyle/>
           <a:p>
             <a:r>
+              <a:rPr lang="ja-JP" altLang="en-US" sz="2400" dirty="0"/>
+              <a:t>処理コストを減らすために</a:t>
+            </a:r>
+            <a:r>
+              <a:rPr kumimoji="1" lang="ja-JP" altLang="en-US" sz="2400" b="1" dirty="0">
+                <a:solidFill>
+                  <a:srgbClr val="FF0000"/>
+                </a:solidFill>
+              </a:rPr>
+              <a:t>オブジェクトプール</a:t>
+            </a:r>
+            <a:r>
               <a:rPr kumimoji="1" lang="ja-JP" altLang="en-US" sz="2400" dirty="0"/>
-              <a:t>親クラス「なし」を選択すると、何もないクラスだけ作られます。</a:t>
+              <a:t>を実装しています。</a:t>
             </a:r>
             <a:endParaRPr kumimoji="1" lang="en-US" altLang="ja-JP" sz="2400" dirty="0"/>
           </a:p>
           <a:p>
             <a:r>
-              <a:rPr kumimoji="1" lang="ja-JP" altLang="en-US" sz="2400" dirty="0"/>
-              <a:t>自作で何か作る場合に適しています。</a:t>
-            </a:r>
-            <a:endParaRPr kumimoji="1" lang="en-US" altLang="ja-JP" sz="2400" dirty="0"/>
+              <a:rPr lang="ja-JP" altLang="en-US" sz="2400" dirty="0"/>
+              <a:t>これで</a:t>
+            </a:r>
+            <a:r>
+              <a:rPr lang="ja-JP" altLang="en-US" sz="2400" b="1" dirty="0">
+                <a:solidFill>
+                  <a:srgbClr val="FF0000"/>
+                </a:solidFill>
+              </a:rPr>
+              <a:t>動的な生成</a:t>
+            </a:r>
+            <a:r>
+              <a:rPr lang="en-US" altLang="ja-JP" sz="2400" b="1" dirty="0">
+                <a:solidFill>
+                  <a:srgbClr val="FF0000"/>
+                </a:solidFill>
+              </a:rPr>
+              <a:t>/</a:t>
+            </a:r>
+            <a:r>
+              <a:rPr lang="ja-JP" altLang="en-US" sz="2400" b="1" dirty="0">
+                <a:solidFill>
+                  <a:srgbClr val="FF0000"/>
+                </a:solidFill>
+              </a:rPr>
+              <a:t>削除を最低限に抑えます。</a:t>
+            </a:r>
+            <a:endParaRPr kumimoji="1" lang="en-US" altLang="ja-JP" sz="2400" b="1" dirty="0">
+              <a:solidFill>
+                <a:srgbClr val="FF0000"/>
+              </a:solidFill>
+            </a:endParaRPr>
           </a:p>
         </p:txBody>
       </p:sp>
@@ -4360,7 +4400,7 @@
           <p:cNvPr id="5" name="図 4">
             <a:extLst>
               <a:ext uri="{FF2B5EF4-FFF2-40B4-BE49-F238E27FC236}">
-                <a16:creationId xmlns:a16="http://schemas.microsoft.com/office/drawing/2014/main" id="{AA600BD9-EAE2-4569-ADD8-E8FB7263332F}"/>
+                <a16:creationId xmlns:a16="http://schemas.microsoft.com/office/drawing/2014/main" id="{8B90D472-1598-49B0-9DD5-0399393D9883}"/>
               </a:ext>
             </a:extLst>
           </p:cNvPr>
@@ -4377,75 +4417,18 @@
         </p:blipFill>
         <p:spPr>
           <a:xfrm>
-            <a:off x="567542" y="2187126"/>
-            <a:ext cx="8713575" cy="4548252"/>
+            <a:off x="567542" y="2187127"/>
+            <a:ext cx="6726578" cy="4464686"/>
           </a:xfrm>
           <a:prstGeom prst="rect">
             <a:avLst/>
           </a:prstGeom>
         </p:spPr>
       </p:pic>
-      <p:sp>
-        <p:nvSpPr>
-          <p:cNvPr id="2" name="正方形/長方形 1">
-            <a:extLst>
-              <a:ext uri="{FF2B5EF4-FFF2-40B4-BE49-F238E27FC236}">
-                <a16:creationId xmlns:a16="http://schemas.microsoft.com/office/drawing/2014/main" id="{193819A3-4B0E-454F-8B0F-28FCF851B396}"/>
-              </a:ext>
-            </a:extLst>
-          </p:cNvPr>
-          <p:cNvSpPr/>
-          <p:nvPr/>
-        </p:nvSpPr>
-        <p:spPr>
-          <a:xfrm>
-            <a:off x="6302188" y="4858870"/>
-            <a:ext cx="2408860" cy="605118"/>
-          </a:xfrm>
-          <a:prstGeom prst="rect">
-            <a:avLst/>
-          </a:prstGeom>
-        </p:spPr>
-        <p:style>
-          <a:lnRef idx="2">
-            <a:schemeClr val="accent1">
-              <a:shade val="50000"/>
-            </a:schemeClr>
-          </a:lnRef>
-          <a:fillRef idx="1">
-            <a:schemeClr val="accent1"/>
-          </a:fillRef>
-          <a:effectRef idx="0">
-            <a:schemeClr val="accent1"/>
-          </a:effectRef>
-          <a:fontRef idx="minor">
-            <a:schemeClr val="lt1"/>
-          </a:fontRef>
-        </p:style>
-        <p:txBody>
-          <a:bodyPr rtlCol="0" anchor="ctr"/>
-          <a:lstStyle/>
-          <a:p>
-            <a:pPr algn="ctr"/>
-            <a:r>
-              <a:rPr kumimoji="1" lang="ja-JP" altLang="en-US" dirty="0"/>
-              <a:t>この辺りは</a:t>
-            </a:r>
-            <a:r>
-              <a:rPr kumimoji="1" lang="en-US" altLang="ja-JP" dirty="0"/>
-              <a:t>UE</a:t>
-            </a:r>
-            <a:r>
-              <a:rPr kumimoji="1" lang="ja-JP" altLang="en-US" dirty="0"/>
-              <a:t>の仕様で必要なもの</a:t>
-            </a:r>
-          </a:p>
-        </p:txBody>
-      </p:sp>
     </p:spTree>
     <p:extLst>
       <p:ext uri="{BB962C8B-B14F-4D97-AF65-F5344CB8AC3E}">
-        <p14:creationId xmlns:p14="http://schemas.microsoft.com/office/powerpoint/2010/main" val="154279274"/>
+        <p14:creationId xmlns:p14="http://schemas.microsoft.com/office/powerpoint/2010/main" val="3833782595"/>
       </p:ext>
     </p:extLst>
   </p:cSld>
@@ -4522,7 +4505,7 @@
         <p:spPr>
           <a:xfrm>
             <a:off x="567542" y="1216429"/>
-            <a:ext cx="8010526" cy="830997"/>
+            <a:ext cx="7800533" cy="830997"/>
           </a:xfrm>
           <a:prstGeom prst="rect">
             <a:avLst/>
@@ -4536,70 +4519,46 @@
           <a:lstStyle/>
           <a:p>
             <a:r>
-              <a:rPr kumimoji="1" lang="en-US" altLang="ja-JP" sz="2400" dirty="0"/>
-              <a:t>Unity</a:t>
-            </a:r>
-            <a:r>
-              <a:rPr kumimoji="1" lang="ja-JP" altLang="en-US" sz="2400" dirty="0"/>
-              <a:t>で学習した</a:t>
-            </a:r>
-            <a:r>
-              <a:rPr kumimoji="1" lang="ja-JP" altLang="en-US" sz="2400" b="1" dirty="0">
+              <a:rPr kumimoji="1" lang="en-US" altLang="ja-JP" sz="2400" b="1" dirty="0" err="1">
                 <a:solidFill>
-                  <a:srgbClr val="FF0000"/>
+                  <a:srgbClr val="00B050"/>
                 </a:solidFill>
               </a:rPr>
-              <a:t>オブジェクトプール</a:t>
+              <a:t>WorldSubsystem</a:t>
             </a:r>
             <a:r>
               <a:rPr kumimoji="1" lang="ja-JP" altLang="en-US" sz="2400" dirty="0"/>
-              <a:t>を実装しています。</a:t>
-            </a:r>
-            <a:endParaRPr kumimoji="1" lang="en-US" altLang="ja-JP" sz="2400" dirty="0"/>
-          </a:p>
-          <a:p>
-            <a:r>
-              <a:rPr lang="ja-JP" altLang="en-US" sz="2400" dirty="0"/>
-              <a:t>これで</a:t>
-            </a:r>
-            <a:r>
-              <a:rPr lang="ja-JP" altLang="en-US" sz="2400" b="1" dirty="0">
+              <a:t>は</a:t>
+            </a:r>
+            <a:r>
+              <a:rPr kumimoji="1" lang="en-US" altLang="ja-JP" sz="2400" b="1" dirty="0" err="1">
                 <a:solidFill>
-                  <a:srgbClr val="FF0000"/>
+                  <a:srgbClr val="00B050"/>
                 </a:solidFill>
               </a:rPr>
-              <a:t>動的な生成</a:t>
-            </a:r>
-            <a:r>
-              <a:rPr lang="en-US" altLang="ja-JP" sz="2400" b="1" dirty="0">
-                <a:solidFill>
-                  <a:srgbClr val="FF0000"/>
-                </a:solidFill>
-              </a:rPr>
-              <a:t>/</a:t>
-            </a:r>
-            <a:r>
-              <a:rPr lang="ja-JP" altLang="en-US" sz="2400" b="1" dirty="0">
-                <a:solidFill>
-                  <a:srgbClr val="FF0000"/>
-                </a:solidFill>
-              </a:rPr>
-              <a:t>削除を最低限に抑えます。</a:t>
-            </a:r>
-            <a:endParaRPr kumimoji="1" lang="en-US" altLang="ja-JP" sz="2400" b="1" dirty="0">
-              <a:solidFill>
-                <a:srgbClr val="FF0000"/>
-              </a:solidFill>
-            </a:endParaRPr>
+              <a:t>UWorld</a:t>
+            </a:r>
+            <a:r>
+              <a:rPr kumimoji="1" lang="ja-JP" altLang="en-US" sz="2400" dirty="0"/>
+              <a:t>クラスから取得できます。</a:t>
+            </a:r>
+            <a:endParaRPr kumimoji="1" lang="en-US" altLang="ja-JP" sz="2400" dirty="0"/>
+          </a:p>
+          <a:p>
+            <a:r>
+              <a:rPr lang="ja-JP" altLang="en-US" sz="2400" dirty="0"/>
+              <a:t>発射処理を書き換えてみましょう。</a:t>
+            </a:r>
+            <a:endParaRPr kumimoji="1" lang="en-US" altLang="ja-JP" sz="2400" dirty="0"/>
           </a:p>
         </p:txBody>
       </p:sp>
       <p:pic>
         <p:nvPicPr>
-          <p:cNvPr id="7" name="図 6">
-            <a:extLst>
-              <a:ext uri="{FF2B5EF4-FFF2-40B4-BE49-F238E27FC236}">
-                <a16:creationId xmlns:a16="http://schemas.microsoft.com/office/drawing/2014/main" id="{2DDAB5A4-0783-4144-A8AB-7B993C11BE62}"/>
+          <p:cNvPr id="8" name="図 7">
+            <a:extLst>
+              <a:ext uri="{FF2B5EF4-FFF2-40B4-BE49-F238E27FC236}">
+                <a16:creationId xmlns:a16="http://schemas.microsoft.com/office/drawing/2014/main" id="{47D8E92C-980C-4033-BE82-A169765ACF96}"/>
               </a:ext>
             </a:extLst>
           </p:cNvPr>
@@ -4617,17 +4576,61 @@
         <p:spPr>
           <a:xfrm>
             <a:off x="567542" y="2187126"/>
-            <a:ext cx="7397655" cy="4178920"/>
+            <a:ext cx="10198682" cy="4178920"/>
           </a:xfrm>
           <a:prstGeom prst="rect">
             <a:avLst/>
           </a:prstGeom>
         </p:spPr>
       </p:pic>
+      <p:sp>
+        <p:nvSpPr>
+          <p:cNvPr id="9" name="テキスト ボックス 8">
+            <a:extLst>
+              <a:ext uri="{FF2B5EF4-FFF2-40B4-BE49-F238E27FC236}">
+                <a16:creationId xmlns:a16="http://schemas.microsoft.com/office/drawing/2014/main" id="{A9D75195-F5C3-470B-890B-732A4746B923}"/>
+              </a:ext>
+            </a:extLst>
+          </p:cNvPr>
+          <p:cNvSpPr txBox="1"/>
+          <p:nvPr/>
+        </p:nvSpPr>
+        <p:spPr>
+          <a:xfrm>
+            <a:off x="7802059" y="6044081"/>
+            <a:ext cx="3570208" cy="461665"/>
+          </a:xfrm>
+          <a:prstGeom prst="rect">
+            <a:avLst/>
+          </a:prstGeom>
+          <a:noFill/>
+        </p:spPr>
+        <p:txBody>
+          <a:bodyPr wrap="none" rtlCol="0">
+            <a:spAutoFit/>
+          </a:bodyPr>
+          <a:lstStyle/>
+          <a:p>
+            <a:r>
+              <a:rPr kumimoji="1" lang="ja-JP" altLang="en-US" sz="2400" b="1" dirty="0">
+                <a:solidFill>
+                  <a:srgbClr val="FF0000"/>
+                </a:solidFill>
+              </a:rPr>
+              <a:t>動作確認してみましょう</a:t>
+            </a:r>
+            <a:endParaRPr kumimoji="1" lang="en-US" altLang="ja-JP" sz="2400" b="1" dirty="0">
+              <a:solidFill>
+                <a:srgbClr val="FF0000"/>
+              </a:solidFill>
+            </a:endParaRPr>
+          </a:p>
+        </p:txBody>
+      </p:sp>
     </p:spTree>
     <p:extLst>
       <p:ext uri="{BB962C8B-B14F-4D97-AF65-F5344CB8AC3E}">
-        <p14:creationId xmlns:p14="http://schemas.microsoft.com/office/powerpoint/2010/main" val="3833782595"/>
+        <p14:creationId xmlns:p14="http://schemas.microsoft.com/office/powerpoint/2010/main" val="2157031536"/>
       </p:ext>
     </p:extLst>
   </p:cSld>
@@ -4669,7 +4672,7 @@
         <p:spPr>
           <a:xfrm>
             <a:off x="567542" y="491954"/>
-            <a:ext cx="3995004" cy="584775"/>
+            <a:ext cx="5226111" cy="584775"/>
           </a:xfrm>
           <a:prstGeom prst="rect">
             <a:avLst/>
@@ -4684,7 +4687,7 @@
           <a:p>
             <a:r>
               <a:rPr kumimoji="1" lang="ja-JP" altLang="en-US" sz="3200" b="1" u="sng" dirty="0"/>
-              <a:t>マネージャークラス</a:t>
+              <a:t>マネージャークラス 補足１</a:t>
             </a:r>
           </a:p>
         </p:txBody>
@@ -4704,7 +4707,7 @@
         <p:spPr>
           <a:xfrm>
             <a:off x="567542" y="1216429"/>
-            <a:ext cx="9778639" cy="830997"/>
+            <a:ext cx="8315097" cy="830997"/>
           </a:xfrm>
           <a:prstGeom prst="rect">
             <a:avLst/>
@@ -4719,43 +4722,65 @@
           <a:p>
             <a:r>
               <a:rPr kumimoji="1" lang="ja-JP" altLang="en-US" sz="2400" dirty="0"/>
-              <a:t>まだプログラムを書いただけで</a:t>
+              <a:t>オブジェクトプール用に</a:t>
             </a:r>
             <a:r>
               <a:rPr kumimoji="1" lang="en-US" altLang="ja-JP" sz="2400" b="1" dirty="0" err="1">
                 <a:solidFill>
-                  <a:srgbClr val="FF0000"/>
+                  <a:srgbClr val="00B050"/>
                 </a:solidFill>
               </a:rPr>
-              <a:t>BulletManager</a:t>
-            </a:r>
-            <a:r>
-              <a:rPr kumimoji="1" lang="ja-JP" altLang="en-US" sz="2400" b="1" dirty="0">
-                <a:solidFill>
-                  <a:srgbClr val="FF0000"/>
-                </a:solidFill>
-              </a:rPr>
-              <a:t>を生成していません。</a:t>
-            </a:r>
-            <a:endParaRPr kumimoji="1" lang="en-US" altLang="ja-JP" sz="2400" b="1" dirty="0">
-              <a:solidFill>
-                <a:srgbClr val="FF0000"/>
-              </a:solidFill>
-            </a:endParaRPr>
+              <a:t>NormalBullet</a:t>
+            </a:r>
+            <a:r>
+              <a:rPr kumimoji="1" lang="ja-JP" altLang="en-US" sz="2400" dirty="0"/>
+              <a:t>を改造しています。</a:t>
+            </a:r>
+            <a:endParaRPr kumimoji="1" lang="en-US" altLang="ja-JP" sz="2400" dirty="0"/>
           </a:p>
           <a:p>
             <a:r>
               <a:rPr lang="ja-JP" altLang="en-US" sz="2400" dirty="0"/>
-              <a:t>マネージャークラスの使い方は次回説明します。</a:t>
+              <a:t>一度確認しておいてください。</a:t>
             </a:r>
             <a:endParaRPr kumimoji="1" lang="en-US" altLang="ja-JP" sz="2400" dirty="0"/>
           </a:p>
         </p:txBody>
       </p:sp>
+      <p:pic>
+        <p:nvPicPr>
+          <p:cNvPr id="3" name="図 2">
+            <a:extLst>
+              <a:ext uri="{FF2B5EF4-FFF2-40B4-BE49-F238E27FC236}">
+                <a16:creationId xmlns:a16="http://schemas.microsoft.com/office/drawing/2014/main" id="{3FF90858-21F3-49C8-8C3D-AC2CB40E5117}"/>
+              </a:ext>
+            </a:extLst>
+          </p:cNvPr>
+          <p:cNvPicPr>
+            <a:picLocks noChangeAspect="1"/>
+          </p:cNvPicPr>
+          <p:nvPr/>
+        </p:nvPicPr>
+        <p:blipFill>
+          <a:blip r:embed="rId2"/>
+          <a:stretch>
+            <a:fillRect/>
+          </a:stretch>
+        </p:blipFill>
+        <p:spPr>
+          <a:xfrm>
+            <a:off x="567542" y="2187126"/>
+            <a:ext cx="4644065" cy="4178920"/>
+          </a:xfrm>
+          <a:prstGeom prst="rect">
+            <a:avLst/>
+          </a:prstGeom>
+        </p:spPr>
+      </p:pic>
     </p:spTree>
     <p:extLst>
       <p:ext uri="{BB962C8B-B14F-4D97-AF65-F5344CB8AC3E}">
-        <p14:creationId xmlns:p14="http://schemas.microsoft.com/office/powerpoint/2010/main" val="767430844"/>
+        <p14:creationId xmlns:p14="http://schemas.microsoft.com/office/powerpoint/2010/main" val="2033412507"/>
       </p:ext>
     </p:extLst>
   </p:cSld>
@@ -4797,7 +4822,7 @@
         <p:spPr>
           <a:xfrm>
             <a:off x="567542" y="491954"/>
-            <a:ext cx="3995004" cy="584775"/>
+            <a:ext cx="5226111" cy="584775"/>
           </a:xfrm>
           <a:prstGeom prst="rect">
             <a:avLst/>
@@ -4812,7 +4837,7 @@
           <a:p>
             <a:r>
               <a:rPr kumimoji="1" lang="ja-JP" altLang="en-US" sz="3200" b="1" u="sng" dirty="0"/>
-              <a:t>マネージャークラス</a:t>
+              <a:t>マネージャークラス 補足２</a:t>
             </a:r>
           </a:p>
         </p:txBody>
@@ -4832,7 +4857,7 @@
         <p:spPr>
           <a:xfrm>
             <a:off x="567542" y="1216429"/>
-            <a:ext cx="8315097" cy="830997"/>
+            <a:ext cx="9286517" cy="3046988"/>
           </a:xfrm>
           <a:prstGeom prst="rect">
             <a:avLst/>
@@ -4846,66 +4871,150 @@
           <a:lstStyle/>
           <a:p>
             <a:r>
-              <a:rPr kumimoji="1" lang="ja-JP" altLang="en-US" sz="2400" dirty="0"/>
-              <a:t>オブジェクトプール用に</a:t>
-            </a:r>
-            <a:r>
               <a:rPr kumimoji="1" lang="en-US" altLang="ja-JP" sz="2400" b="1" dirty="0" err="1">
                 <a:solidFill>
                   <a:srgbClr val="00B050"/>
                 </a:solidFill>
               </a:rPr>
-              <a:t>NormalBullet</a:t>
+              <a:t>UWorld</a:t>
+            </a:r>
+            <a:r>
+              <a:rPr kumimoji="1" lang="ja-JP" altLang="en-US" sz="2400" b="1" dirty="0">
+                <a:solidFill>
+                  <a:srgbClr val="00B050"/>
+                </a:solidFill>
+              </a:rPr>
+              <a:t>クラス</a:t>
             </a:r>
             <a:r>
               <a:rPr kumimoji="1" lang="ja-JP" altLang="en-US" sz="2400" dirty="0"/>
-              <a:t>を改造しています。</a:t>
+              <a:t>はレベル切り替えをすると新しく作り直されます。</a:t>
             </a:r>
             <a:endParaRPr kumimoji="1" lang="en-US" altLang="ja-JP" sz="2400" dirty="0"/>
           </a:p>
           <a:p>
             <a:r>
+              <a:rPr lang="en-US" altLang="ja-JP" sz="2400" b="1" dirty="0" err="1">
+                <a:solidFill>
+                  <a:srgbClr val="00B050"/>
+                </a:solidFill>
+              </a:rPr>
+              <a:t>UWorldSubsystem</a:t>
+            </a:r>
+            <a:r>
+              <a:rPr lang="ja-JP" altLang="en-US" sz="2400" b="1" dirty="0">
+                <a:solidFill>
+                  <a:srgbClr val="00B050"/>
+                </a:solidFill>
+              </a:rPr>
+              <a:t>クラス</a:t>
+            </a:r>
+            <a:r>
               <a:rPr lang="ja-JP" altLang="en-US" sz="2400" dirty="0"/>
-              <a:t>一度確認しておいてください。</a:t>
+              <a:t>は</a:t>
+            </a:r>
+            <a:r>
+              <a:rPr lang="en-US" altLang="ja-JP" sz="2400" b="1" dirty="0" err="1">
+                <a:solidFill>
+                  <a:srgbClr val="00B050"/>
+                </a:solidFill>
+              </a:rPr>
+              <a:t>UWorld</a:t>
+            </a:r>
+            <a:r>
+              <a:rPr lang="ja-JP" altLang="en-US" sz="2400" b="1" dirty="0">
+                <a:solidFill>
+                  <a:srgbClr val="00B050"/>
+                </a:solidFill>
+              </a:rPr>
+              <a:t>クラス</a:t>
+            </a:r>
+            <a:r>
+              <a:rPr lang="ja-JP" altLang="en-US" sz="2400" dirty="0"/>
+              <a:t>と紐づいているので、</a:t>
+            </a:r>
+            <a:endParaRPr lang="en-US" altLang="ja-JP" sz="2400" dirty="0"/>
+          </a:p>
+          <a:p>
+            <a:r>
+              <a:rPr lang="ja-JP" altLang="en-US" sz="2400" b="1" dirty="0">
+                <a:solidFill>
+                  <a:srgbClr val="FF0000"/>
+                </a:solidFill>
+              </a:rPr>
+              <a:t>レベルが切り替わると作り直されます。</a:t>
+            </a:r>
+            <a:endParaRPr lang="en-US" altLang="ja-JP" sz="2400" b="1" dirty="0">
+              <a:solidFill>
+                <a:srgbClr val="FF0000"/>
+              </a:solidFill>
+            </a:endParaRPr>
+          </a:p>
+          <a:p>
+            <a:r>
+              <a:rPr kumimoji="1" lang="ja-JP" altLang="en-US" sz="2400" b="1" dirty="0">
+                <a:solidFill>
+                  <a:srgbClr val="FF0000"/>
+                </a:solidFill>
+              </a:rPr>
+              <a:t>メンバ変数などリセットされる</a:t>
+            </a:r>
+            <a:r>
+              <a:rPr kumimoji="1" lang="ja-JP" altLang="en-US" sz="2400" dirty="0"/>
+              <a:t>ので気を付けておきましょう。</a:t>
             </a:r>
             <a:endParaRPr kumimoji="1" lang="en-US" altLang="ja-JP" sz="2400" dirty="0"/>
           </a:p>
-        </p:txBody>
-      </p:sp>
-      <p:pic>
-        <p:nvPicPr>
-          <p:cNvPr id="3" name="図 2">
-            <a:extLst>
-              <a:ext uri="{FF2B5EF4-FFF2-40B4-BE49-F238E27FC236}">
-                <a16:creationId xmlns:a16="http://schemas.microsoft.com/office/drawing/2014/main" id="{3FF90858-21F3-49C8-8C3D-AC2CB40E5117}"/>
-              </a:ext>
-            </a:extLst>
-          </p:cNvPr>
-          <p:cNvPicPr>
-            <a:picLocks noChangeAspect="1"/>
-          </p:cNvPicPr>
-          <p:nvPr/>
-        </p:nvPicPr>
-        <p:blipFill>
-          <a:blip r:embed="rId2"/>
-          <a:stretch>
-            <a:fillRect/>
-          </a:stretch>
-        </p:blipFill>
-        <p:spPr>
-          <a:xfrm>
-            <a:off x="567542" y="2187126"/>
-            <a:ext cx="4644065" cy="4178920"/>
-          </a:xfrm>
-          <a:prstGeom prst="rect">
-            <a:avLst/>
-          </a:prstGeom>
-        </p:spPr>
-      </p:pic>
+          <a:p>
+            <a:endParaRPr lang="en-US" altLang="ja-JP" sz="2400" dirty="0"/>
+          </a:p>
+          <a:p>
+            <a:r>
+              <a:rPr kumimoji="1" lang="ja-JP" altLang="en-US" sz="2400" dirty="0"/>
+              <a:t>もしも</a:t>
+            </a:r>
+            <a:r>
+              <a:rPr kumimoji="1" lang="ja-JP" altLang="en-US" sz="2400" b="1" dirty="0">
+                <a:solidFill>
+                  <a:srgbClr val="FF0000"/>
+                </a:solidFill>
+              </a:rPr>
+              <a:t>レベルを跨いで値を保持したい</a:t>
+            </a:r>
+            <a:r>
+              <a:rPr kumimoji="1" lang="ja-JP" altLang="en-US" sz="2400" dirty="0"/>
+              <a:t>のであれば、</a:t>
+            </a:r>
+            <a:endParaRPr kumimoji="1" lang="en-US" altLang="ja-JP" sz="2400" dirty="0"/>
+          </a:p>
+          <a:p>
+            <a:r>
+              <a:rPr lang="ja-JP" altLang="en-US" sz="2400" dirty="0"/>
+              <a:t>ゲーム起動中ずっと保持される</a:t>
+            </a:r>
+            <a:endParaRPr lang="en-US" altLang="ja-JP" sz="2400" dirty="0"/>
+          </a:p>
+          <a:p>
+            <a:r>
+              <a:rPr lang="en-US" altLang="ja-JP" sz="2400" b="1" dirty="0" err="1">
+                <a:solidFill>
+                  <a:srgbClr val="00B050"/>
+                </a:solidFill>
+              </a:rPr>
+              <a:t>GameInstanceSubsystem</a:t>
+            </a:r>
+            <a:r>
+              <a:rPr lang="ja-JP" altLang="en-US" sz="2400" dirty="0"/>
+              <a:t>を代わりに使いましょう。</a:t>
+            </a:r>
+            <a:endParaRPr kumimoji="1" lang="en-US" altLang="ja-JP" sz="2400" dirty="0"/>
+          </a:p>
+        </p:txBody>
+      </p:sp>
     </p:spTree>
     <p:extLst>
       <p:ext uri="{BB962C8B-B14F-4D97-AF65-F5344CB8AC3E}">
-        <p14:creationId xmlns:p14="http://schemas.microsoft.com/office/powerpoint/2010/main" val="2033412507"/>
+        <p14:creationId xmlns:p14="http://schemas.microsoft.com/office/powerpoint/2010/main" val="3425149113"/>
       </p:ext>
     </p:extLst>
   </p:cSld>
